--- a/presentation/Final Presentation.pptx
+++ b/presentation/Final Presentation.pptx
@@ -20,8 +20,8 @@
     <p:sldId id="264" r:id="rId11"/>
     <p:sldId id="265" r:id="rId12"/>
     <p:sldId id="266" r:id="rId13"/>
-    <p:sldId id="267" r:id="rId14"/>
-    <p:sldId id="268" r:id="rId15"/>
+    <p:sldId id="268" r:id="rId14"/>
+    <p:sldId id="267" r:id="rId15"/>
     <p:sldId id="272" r:id="rId16"/>
     <p:sldId id="269" r:id="rId17"/>
     <p:sldId id="270" r:id="rId18"/>
@@ -21176,7 +21176,7 @@
           <p:cNvPr id="2" name="Title 1">
             <a:extLst>
               <a:ext uri="{FF2B5EF4-FFF2-40B4-BE49-F238E27FC236}">
-                <a16:creationId xmlns:a16="http://schemas.microsoft.com/office/drawing/2014/main" id="{5DD7A03E-E483-C10A-1A40-37CA0E5152F3}"/>
+                <a16:creationId xmlns:a16="http://schemas.microsoft.com/office/drawing/2014/main" id="{02FEF1E3-9620-785A-624A-E85550B6DCC1}"/>
               </a:ext>
             </a:extLst>
           </p:cNvPr>
@@ -21194,7 +21194,7 @@
           <a:p>
             <a:r>
               <a:rPr lang="en-US" dirty="0"/>
-              <a:t>Key decisions</a:t>
+              <a:t>Complex structure study</a:t>
             </a:r>
           </a:p>
         </p:txBody>
@@ -21204,7 +21204,7 @@
           <p:cNvPr id="3" name="Content Placeholder 2">
             <a:extLst>
               <a:ext uri="{FF2B5EF4-FFF2-40B4-BE49-F238E27FC236}">
-                <a16:creationId xmlns:a16="http://schemas.microsoft.com/office/drawing/2014/main" id="{7379816E-5A78-50FB-2951-072BFD33BE04}"/>
+                <a16:creationId xmlns:a16="http://schemas.microsoft.com/office/drawing/2014/main" id="{BD5D23C1-2083-AD41-58D1-25626D99C6A7}"/>
               </a:ext>
             </a:extLst>
           </p:cNvPr>
@@ -21219,6 +21219,12 @@
         <p:txBody>
           <a:bodyPr/>
           <a:lstStyle/>
+          <a:p>
+            <a:r>
+              <a:rPr lang="en-US" dirty="0"/>
+              <a:t>High Line Moynihan Connector</a:t>
+            </a:r>
+          </a:p>
           <a:p>
             <a:pPr marL="285750" indent="-285750">
               <a:buFont typeface="Arial" panose="020B0604020202020204" pitchFamily="34" charset="0"/>
@@ -21226,7 +21232,76 @@
             </a:pPr>
             <a:r>
               <a:rPr lang="en-US" dirty="0"/>
-              <a:t>Structural Idealization</a:t>
+              <a:t>Located in NYC (2023)</a:t>
+            </a:r>
+          </a:p>
+          <a:p>
+            <a:pPr marL="285750" indent="-285750">
+              <a:buFont typeface="Arial" panose="020B0604020202020204" pitchFamily="34" charset="0"/>
+              <a:buChar char="•"/>
+            </a:pPr>
+            <a:r>
+              <a:rPr lang="en-US" dirty="0"/>
+              <a:t>Two Sections (Steel Viaduct and Timber Bridge)</a:t>
+            </a:r>
+          </a:p>
+          <a:p>
+            <a:pPr marL="285750" indent="-285750">
+              <a:buFont typeface="Arial" panose="020B0604020202020204" pitchFamily="34" charset="0"/>
+              <a:buChar char="•"/>
+            </a:pPr>
+            <a:r>
+              <a:rPr lang="en-US" dirty="0"/>
+              <a:t>260 ft span, 20ft height, 15.5 ft width</a:t>
+            </a:r>
+          </a:p>
+          <a:p>
+            <a:pPr marL="285750" indent="-285750">
+              <a:buFont typeface="Arial" panose="020B0604020202020204" pitchFamily="34" charset="0"/>
+              <a:buChar char="•"/>
+            </a:pPr>
+            <a:r>
+              <a:rPr lang="en-US" dirty="0"/>
+              <a:t>Frame Elements for main longitudinal and transverse members</a:t>
+            </a:r>
+          </a:p>
+          <a:p>
+            <a:pPr marL="285750" indent="-285750">
+              <a:buFont typeface="Arial" panose="020B0604020202020204" pitchFamily="34" charset="0"/>
+              <a:buChar char="•"/>
+            </a:pPr>
+            <a:r>
+              <a:rPr lang="en-US" dirty="0"/>
+              <a:t>Truss Elements assigned to diagonal members</a:t>
+            </a:r>
+          </a:p>
+          <a:p>
+            <a:endParaRPr lang="en-US" dirty="0"/>
+          </a:p>
+          <a:p>
+            <a:r>
+              <a:rPr lang="en-US" dirty="0"/>
+              <a:t>Why?</a:t>
+            </a:r>
+          </a:p>
+          <a:p>
+            <a:pPr marL="285750" indent="-285750">
+              <a:buFont typeface="Arial" panose="020B0604020202020204" pitchFamily="34" charset="0"/>
+              <a:buChar char="•"/>
+            </a:pPr>
+            <a:r>
+              <a:rPr lang="en-US" dirty="0"/>
+              <a:t>Take a bridge and apply truss and frame elements</a:t>
+            </a:r>
+          </a:p>
+          <a:p>
+            <a:pPr marL="285750" indent="-285750">
+              <a:buFont typeface="Arial" panose="020B0604020202020204" pitchFamily="34" charset="0"/>
+              <a:buChar char="•"/>
+            </a:pPr>
+            <a:r>
+              <a:rPr lang="en-US" dirty="0"/>
+              <a:t>Perform Two Case Studies</a:t>
             </a:r>
           </a:p>
           <a:p>
@@ -21236,17 +21311,7 @@
             </a:pPr>
             <a:r>
               <a:rPr lang="en-US" dirty="0"/>
-              <a:t>Modeled bridge using 3D frame + truss elements</a:t>
-            </a:r>
-          </a:p>
-          <a:p>
-            <a:pPr marL="285750" indent="-285750">
-              <a:buFont typeface="Arial" panose="020B0604020202020204" pitchFamily="34" charset="0"/>
-              <a:buChar char="•"/>
-            </a:pPr>
-            <a:r>
-              <a:rPr lang="en-US" dirty="0"/>
-              <a:t>Element Type Selection</a:t>
+              <a:t>Case 1: What are the effects during a Polar Vortex?</a:t>
             </a:r>
           </a:p>
           <a:p>
@@ -21256,137 +21321,62 @@
             </a:pPr>
             <a:r>
               <a:rPr lang="en-US" dirty="0"/>
-              <a:t>Allowed users more flexibility in choosing member type</a:t>
-            </a:r>
-          </a:p>
-          <a:p>
-            <a:pPr marL="285750" indent="-285750">
-              <a:buFont typeface="Arial" panose="020B0604020202020204" pitchFamily="34" charset="0"/>
-              <a:buChar char="•"/>
-            </a:pPr>
-            <a:r>
-              <a:rPr lang="en-US" dirty="0"/>
-              <a:t>Boundary Conditions</a:t>
-            </a:r>
-          </a:p>
-          <a:p>
-            <a:pPr marL="514350" lvl="1" indent="-285750">
-              <a:buFont typeface="Arial" panose="020B0604020202020204" pitchFamily="34" charset="0"/>
-              <a:buChar char="•"/>
-            </a:pPr>
-            <a:r>
-              <a:rPr lang="en-US" dirty="0"/>
-              <a:t>Fixed DOFs [</a:t>
-            </a:r>
-            <a:r>
-              <a:rPr lang="en-US" dirty="0" err="1"/>
-              <a:t>u</a:t>
-            </a:r>
-            <a:r>
-              <a:rPr lang="en-US" baseline="-25000" dirty="0" err="1"/>
-              <a:t>x</a:t>
-            </a:r>
-            <a:r>
-              <a:rPr lang="en-US" dirty="0"/>
-              <a:t>, </a:t>
-            </a:r>
-            <a:r>
-              <a:rPr lang="en-US" dirty="0" err="1"/>
-              <a:t>u</a:t>
-            </a:r>
-            <a:r>
-              <a:rPr lang="en-US" baseline="-25000" dirty="0" err="1"/>
-              <a:t>y</a:t>
-            </a:r>
-            <a:r>
-              <a:rPr lang="en-US" dirty="0"/>
-              <a:t>, </a:t>
-            </a:r>
-            <a:r>
-              <a:rPr lang="en-US" dirty="0" err="1"/>
-              <a:t>u</a:t>
-            </a:r>
-            <a:r>
-              <a:rPr lang="en-US" baseline="-25000" dirty="0" err="1"/>
-              <a:t>z</a:t>
-            </a:r>
-            <a:r>
-              <a:rPr lang="en-US" dirty="0"/>
-              <a:t>, </a:t>
-            </a:r>
-            <a:r>
-              <a:rPr lang="en-US" dirty="0" err="1"/>
-              <a:t>r</a:t>
-            </a:r>
-            <a:r>
-              <a:rPr lang="en-US" baseline="-25000" dirty="0" err="1"/>
-              <a:t>x</a:t>
-            </a:r>
-            <a:r>
-              <a:rPr lang="en-US" dirty="0"/>
-              <a:t>, </a:t>
-            </a:r>
-            <a:r>
-              <a:rPr lang="en-US" dirty="0" err="1"/>
-              <a:t>r</a:t>
-            </a:r>
-            <a:r>
-              <a:rPr lang="en-US" baseline="-25000" dirty="0" err="1"/>
-              <a:t>y</a:t>
-            </a:r>
-            <a:r>
-              <a:rPr lang="en-US" dirty="0"/>
-              <a:t>, </a:t>
-            </a:r>
-            <a:r>
-              <a:rPr lang="en-US" dirty="0" err="1"/>
-              <a:t>r</a:t>
-            </a:r>
-            <a:r>
-              <a:rPr lang="en-US" baseline="-25000" dirty="0" err="1"/>
-              <a:t>z</a:t>
-            </a:r>
-            <a:r>
-              <a:rPr lang="en-US" dirty="0"/>
-              <a:t>] where base nodes fully restrained </a:t>
-            </a:r>
-          </a:p>
-          <a:p>
-            <a:pPr marL="285750" indent="-285750">
-              <a:buFont typeface="Arial" panose="020B0604020202020204" pitchFamily="34" charset="0"/>
-              <a:buChar char="•"/>
-            </a:pPr>
-            <a:r>
-              <a:rPr lang="en-US" dirty="0"/>
-              <a:t>Geometry Simplification</a:t>
-            </a:r>
-          </a:p>
-          <a:p>
-            <a:pPr marL="285750" indent="-285750">
-              <a:buFont typeface="Arial" panose="020B0604020202020204" pitchFamily="34" charset="0"/>
-              <a:buChar char="•"/>
-            </a:pPr>
-            <a:r>
-              <a:rPr lang="en-US" dirty="0"/>
-              <a:t>Material Assumptions</a:t>
-            </a:r>
-          </a:p>
-          <a:p>
-            <a:pPr marL="285750" indent="-285750">
-              <a:buFont typeface="Arial" panose="020B0604020202020204" pitchFamily="34" charset="0"/>
-              <a:buChar char="•"/>
-            </a:pPr>
-            <a:r>
-              <a:rPr lang="en-US" dirty="0"/>
-              <a:t>Load Case Selection</a:t>
-            </a:r>
-          </a:p>
-        </p:txBody>
-      </p:sp>
+              <a:t>Case 2: What if received a bad batch of timber</a:t>
+            </a:r>
+          </a:p>
+        </p:txBody>
+      </p:sp>
+      <p:pic>
+        <p:nvPicPr>
+          <p:cNvPr id="1026" name="Picture 2" descr="Building of the Day: High Line - Moynihan Connector - Calendar - AIA New  York / Center for Architecture">
+            <a:extLst>
+              <a:ext uri="{FF2B5EF4-FFF2-40B4-BE49-F238E27FC236}">
+                <a16:creationId xmlns:a16="http://schemas.microsoft.com/office/drawing/2014/main" id="{A65233CE-AD20-A518-1639-C29F32BA5E59}"/>
+              </a:ext>
+            </a:extLst>
+          </p:cNvPr>
+          <p:cNvPicPr>
+            <a:picLocks noChangeAspect="1" noChangeArrowheads="1"/>
+          </p:cNvPicPr>
+          <p:nvPr/>
+        </p:nvPicPr>
+        <p:blipFill>
+          <a:blip r:embed="rId2">
+            <a:extLst>
+              <a:ext uri="{28A0092B-C50C-407E-A947-70E740481C1C}">
+                <a14:useLocalDpi xmlns:a14="http://schemas.microsoft.com/office/drawing/2010/main" val="0"/>
+              </a:ext>
+            </a:extLst>
+          </a:blip>
+          <a:srcRect/>
+          <a:stretch>
+            <a:fillRect/>
+          </a:stretch>
+        </p:blipFill>
+        <p:spPr bwMode="auto">
+          <a:xfrm>
+            <a:off x="6094475" y="1781070"/>
+            <a:ext cx="5715000" cy="3402536"/>
+          </a:xfrm>
+          <a:prstGeom prst="rect">
+            <a:avLst/>
+          </a:prstGeom>
+          <a:noFill/>
+          <a:extLst>
+            <a:ext uri="{909E8E84-426E-40DD-AFC4-6F175D3DCCD1}">
+              <a14:hiddenFill xmlns:a14="http://schemas.microsoft.com/office/drawing/2010/main">
+                <a:solidFill>
+                  <a:srgbClr val="FFFFFF"/>
+                </a:solidFill>
+              </a14:hiddenFill>
+            </a:ext>
+          </a:extLst>
+        </p:spPr>
+      </p:pic>
     </p:spTree>
     <p:extLst>
       <p:ext uri="{BB962C8B-B14F-4D97-AF65-F5344CB8AC3E}">
-        <p14:creationId xmlns:p14="http://schemas.microsoft.com/office/powerpoint/2010/main" val="884238757"/>
+        <p14:creationId xmlns:p14="http://schemas.microsoft.com/office/powerpoint/2010/main" val="3431012329"/>
       </p:ext>
     </p:extLst>
   </p:cSld>
@@ -21418,7 +21408,7 @@
           <p:cNvPr id="2" name="Title 1">
             <a:extLst>
               <a:ext uri="{FF2B5EF4-FFF2-40B4-BE49-F238E27FC236}">
-                <a16:creationId xmlns:a16="http://schemas.microsoft.com/office/drawing/2014/main" id="{02FEF1E3-9620-785A-624A-E85550B6DCC1}"/>
+                <a16:creationId xmlns:a16="http://schemas.microsoft.com/office/drawing/2014/main" id="{5DD7A03E-E483-C10A-1A40-37CA0E5152F3}"/>
               </a:ext>
             </a:extLst>
           </p:cNvPr>
@@ -21436,7 +21426,7 @@
           <a:p>
             <a:r>
               <a:rPr lang="en-US" dirty="0"/>
-              <a:t>Complex structure study</a:t>
+              <a:t>Key decisions</a:t>
             </a:r>
           </a:p>
         </p:txBody>
@@ -21446,7 +21436,7 @@
           <p:cNvPr id="3" name="Content Placeholder 2">
             <a:extLst>
               <a:ext uri="{FF2B5EF4-FFF2-40B4-BE49-F238E27FC236}">
-                <a16:creationId xmlns:a16="http://schemas.microsoft.com/office/drawing/2014/main" id="{BD5D23C1-2083-AD41-58D1-25626D99C6A7}"/>
+                <a16:creationId xmlns:a16="http://schemas.microsoft.com/office/drawing/2014/main" id="{7379816E-5A78-50FB-2951-072BFD33BE04}"/>
               </a:ext>
             </a:extLst>
           </p:cNvPr>
@@ -21461,12 +21451,6 @@
         <p:txBody>
           <a:bodyPr/>
           <a:lstStyle/>
-          <a:p>
-            <a:r>
-              <a:rPr lang="en-US" dirty="0"/>
-              <a:t>High Line Moynihan Connector</a:t>
-            </a:r>
-          </a:p>
           <a:p>
             <a:pPr marL="285750" indent="-285750">
               <a:buFont typeface="Arial" panose="020B0604020202020204" pitchFamily="34" charset="0"/>
@@ -21474,7 +21458,17 @@
             </a:pPr>
             <a:r>
               <a:rPr lang="en-US" dirty="0"/>
-              <a:t>Located in NYC</a:t>
+              <a:t>Structural Idealization</a:t>
+            </a:r>
+          </a:p>
+          <a:p>
+            <a:pPr marL="514350" lvl="1" indent="-285750">
+              <a:buFont typeface="Arial" panose="020B0604020202020204" pitchFamily="34" charset="0"/>
+              <a:buChar char="•"/>
+            </a:pPr>
+            <a:r>
+              <a:rPr lang="en-US" dirty="0"/>
+              <a:t>Modeled bridge using 3D frame + truss elements</a:t>
             </a:r>
           </a:p>
           <a:p>
@@ -21484,7 +21478,17 @@
             </a:pPr>
             <a:r>
               <a:rPr lang="en-US" dirty="0"/>
-              <a:t>Two Sections (Steel Viaduct and Timber Bridge)</a:t>
+              <a:t>Element Type Selection</a:t>
+            </a:r>
+          </a:p>
+          <a:p>
+            <a:pPr marL="514350" lvl="1" indent="-285750">
+              <a:buFont typeface="Arial" panose="020B0604020202020204" pitchFamily="34" charset="0"/>
+              <a:buChar char="•"/>
+            </a:pPr>
+            <a:r>
+              <a:rPr lang="en-US" dirty="0"/>
+              <a:t>Allowed users more flexibility in choosing member type</a:t>
             </a:r>
           </a:p>
           <a:p>
@@ -21494,7 +21498,89 @@
             </a:pPr>
             <a:r>
               <a:rPr lang="en-US" dirty="0"/>
-              <a:t>260 ft span</a:t>
+              <a:t>Boundary Conditions</a:t>
+            </a:r>
+          </a:p>
+          <a:p>
+            <a:pPr marL="514350" lvl="1" indent="-285750">
+              <a:buFont typeface="Arial" panose="020B0604020202020204" pitchFamily="34" charset="0"/>
+              <a:buChar char="•"/>
+            </a:pPr>
+            <a:r>
+              <a:rPr lang="en-US" dirty="0"/>
+              <a:t>Fixed DOFs [</a:t>
+            </a:r>
+            <a:r>
+              <a:rPr lang="en-US" dirty="0" err="1"/>
+              <a:t>u</a:t>
+            </a:r>
+            <a:r>
+              <a:rPr lang="en-US" baseline="-25000" dirty="0" err="1"/>
+              <a:t>x</a:t>
+            </a:r>
+            <a:r>
+              <a:rPr lang="en-US" dirty="0"/>
+              <a:t>, </a:t>
+            </a:r>
+            <a:r>
+              <a:rPr lang="en-US" dirty="0" err="1"/>
+              <a:t>u</a:t>
+            </a:r>
+            <a:r>
+              <a:rPr lang="en-US" baseline="-25000" dirty="0" err="1"/>
+              <a:t>y</a:t>
+            </a:r>
+            <a:r>
+              <a:rPr lang="en-US" dirty="0"/>
+              <a:t>, </a:t>
+            </a:r>
+            <a:r>
+              <a:rPr lang="en-US" dirty="0" err="1"/>
+              <a:t>u</a:t>
+            </a:r>
+            <a:r>
+              <a:rPr lang="en-US" baseline="-25000" dirty="0" err="1"/>
+              <a:t>z</a:t>
+            </a:r>
+            <a:r>
+              <a:rPr lang="en-US" dirty="0"/>
+              <a:t>, </a:t>
+            </a:r>
+            <a:r>
+              <a:rPr lang="en-US" dirty="0" err="1"/>
+              <a:t>r</a:t>
+            </a:r>
+            <a:r>
+              <a:rPr lang="en-US" baseline="-25000" dirty="0" err="1"/>
+              <a:t>x</a:t>
+            </a:r>
+            <a:r>
+              <a:rPr lang="en-US" dirty="0"/>
+              <a:t>, </a:t>
+            </a:r>
+            <a:r>
+              <a:rPr lang="en-US" dirty="0" err="1"/>
+              <a:t>r</a:t>
+            </a:r>
+            <a:r>
+              <a:rPr lang="en-US" baseline="-25000" dirty="0" err="1"/>
+              <a:t>y</a:t>
+            </a:r>
+            <a:r>
+              <a:rPr lang="en-US" dirty="0"/>
+              <a:t>, </a:t>
+            </a:r>
+            <a:r>
+              <a:rPr lang="en-US" dirty="0" err="1"/>
+              <a:t>r</a:t>
+            </a:r>
+            <a:r>
+              <a:rPr lang="en-US" baseline="-25000" dirty="0" err="1"/>
+              <a:t>z</a:t>
+            </a:r>
+            <a:r>
+              <a:rPr lang="en-US" dirty="0"/>
+              <a:t>] where base nodes fully restrained </a:t>
             </a:r>
           </a:p>
           <a:p>
@@ -21504,7 +21590,7 @@
             </a:pPr>
             <a:r>
               <a:rPr lang="en-US" dirty="0"/>
-              <a:t>Frame Elements for main longitudinal and transverse members</a:t>
+              <a:t>Geometry Simplification</a:t>
             </a:r>
           </a:p>
           <a:p>
@@ -21514,16 +21600,27 @@
             </a:pPr>
             <a:r>
               <a:rPr lang="en-US" dirty="0"/>
-              <a:t>Truss Elements assigned to diagonal members</a:t>
-            </a:r>
-          </a:p>
-          <a:p>
-            <a:endParaRPr lang="en-US" dirty="0"/>
-          </a:p>
-          <a:p>
+              <a:t>Material Assumptions</a:t>
+            </a:r>
+          </a:p>
+          <a:p>
+            <a:pPr marL="514350" lvl="1" indent="-285750">
+              <a:buFont typeface="Arial" panose="020B0604020202020204" pitchFamily="34" charset="0"/>
+              <a:buChar char="•"/>
+            </a:pPr>
             <a:r>
               <a:rPr lang="en-US" dirty="0"/>
-              <a:t>Why?</a:t>
+              <a:t>Linear Elastic Behavior</a:t>
+            </a:r>
+          </a:p>
+          <a:p>
+            <a:pPr marL="514350" lvl="1" indent="-285750">
+              <a:buFont typeface="Arial" panose="020B0604020202020204" pitchFamily="34" charset="0"/>
+              <a:buChar char="•"/>
+            </a:pPr>
+            <a:r>
+              <a:rPr lang="en-US" dirty="0"/>
+              <a:t>E, A, I assumptions</a:t>
             </a:r>
           </a:p>
           <a:p>
@@ -21533,92 +21630,15 @@
             </a:pPr>
             <a:r>
               <a:rPr lang="en-US" dirty="0"/>
-              <a:t>Take a bridge and apply truss and frame elements</a:t>
-            </a:r>
-          </a:p>
-          <a:p>
-            <a:pPr marL="285750" indent="-285750">
-              <a:buFont typeface="Arial" panose="020B0604020202020204" pitchFamily="34" charset="0"/>
-              <a:buChar char="•"/>
-            </a:pPr>
-            <a:r>
-              <a:rPr lang="en-US" dirty="0"/>
-              <a:t>Perform Two Case Studies</a:t>
-            </a:r>
-          </a:p>
-          <a:p>
-            <a:pPr marL="514350" lvl="1" indent="-285750">
-              <a:buFont typeface="Arial" panose="020B0604020202020204" pitchFamily="34" charset="0"/>
-              <a:buChar char="•"/>
-            </a:pPr>
-            <a:r>
-              <a:rPr lang="en-US" dirty="0"/>
-              <a:t>Case 1: What are the effects during a Polar Vortex?</a:t>
-            </a:r>
-          </a:p>
-          <a:p>
-            <a:pPr marL="514350" lvl="1" indent="-285750">
-              <a:buFont typeface="Arial" panose="020B0604020202020204" pitchFamily="34" charset="0"/>
-              <a:buChar char="•"/>
-            </a:pPr>
-            <a:r>
-              <a:rPr lang="en-US" dirty="0"/>
-              <a:t>Case 2: What if received a bad batch of timber</a:t>
-            </a:r>
-          </a:p>
-        </p:txBody>
-      </p:sp>
-      <p:pic>
-        <p:nvPicPr>
-          <p:cNvPr id="1026" name="Picture 2" descr="Building of the Day: High Line - Moynihan Connector - Calendar - AIA New  York / Center for Architecture">
-            <a:extLst>
-              <a:ext uri="{FF2B5EF4-FFF2-40B4-BE49-F238E27FC236}">
-                <a16:creationId xmlns:a16="http://schemas.microsoft.com/office/drawing/2014/main" id="{A65233CE-AD20-A518-1639-C29F32BA5E59}"/>
-              </a:ext>
-            </a:extLst>
-          </p:cNvPr>
-          <p:cNvPicPr>
-            <a:picLocks noChangeAspect="1" noChangeArrowheads="1"/>
-          </p:cNvPicPr>
-          <p:nvPr/>
-        </p:nvPicPr>
-        <p:blipFill>
-          <a:blip r:embed="rId2">
-            <a:extLst>
-              <a:ext uri="{28A0092B-C50C-407E-A947-70E740481C1C}">
-                <a14:useLocalDpi xmlns:a14="http://schemas.microsoft.com/office/drawing/2010/main" val="0"/>
-              </a:ext>
-            </a:extLst>
-          </a:blip>
-          <a:srcRect/>
-          <a:stretch>
-            <a:fillRect/>
-          </a:stretch>
-        </p:blipFill>
-        <p:spPr bwMode="auto">
-          <a:xfrm>
-            <a:off x="6094475" y="1781070"/>
-            <a:ext cx="5715000" cy="3402536"/>
-          </a:xfrm>
-          <a:prstGeom prst="rect">
-            <a:avLst/>
-          </a:prstGeom>
-          <a:noFill/>
-          <a:extLst>
-            <a:ext uri="{909E8E84-426E-40DD-AFC4-6F175D3DCCD1}">
-              <a14:hiddenFill xmlns:a14="http://schemas.microsoft.com/office/drawing/2010/main">
-                <a:solidFill>
-                  <a:srgbClr val="FFFFFF"/>
-                </a:solidFill>
-              </a14:hiddenFill>
-            </a:ext>
-          </a:extLst>
-        </p:spPr>
-      </p:pic>
+              <a:t>Load Case Selection</a:t>
+            </a:r>
+          </a:p>
+        </p:txBody>
+      </p:sp>
     </p:spTree>
     <p:extLst>
       <p:ext uri="{BB962C8B-B14F-4D97-AF65-F5344CB8AC3E}">
-        <p14:creationId xmlns:p14="http://schemas.microsoft.com/office/powerpoint/2010/main" val="3431012329"/>
+        <p14:creationId xmlns:p14="http://schemas.microsoft.com/office/powerpoint/2010/main" val="884238757"/>
       </p:ext>
     </p:extLst>
   </p:cSld>
@@ -22508,19 +22528,6 @@
             </a:pPr>
             <a:r>
               <a:rPr lang="en-US" sz="2000" dirty="0"/>
-              <a:t>Key Decisions</a:t>
-            </a:r>
-          </a:p>
-          <a:p>
-            <a:pPr marL="285750" indent="-285750">
-              <a:lnSpc>
-                <a:spcPct val="200000"/>
-              </a:lnSpc>
-              <a:buFont typeface="Arial" panose="020B0604020202020204" pitchFamily="34" charset="0"/>
-              <a:buChar char="•"/>
-            </a:pPr>
-            <a:r>
-              <a:rPr lang="en-US" sz="2000" dirty="0"/>
               <a:t>Complex Structure Study</a:t>
             </a:r>
           </a:p>
@@ -22608,8 +22615,68 @@
         </p:blipFill>
         <p:spPr>
           <a:xfrm>
-            <a:off x="4419600" y="1676400"/>
-            <a:ext cx="2800093" cy="4343400"/>
+            <a:off x="1066800" y="1600200"/>
+            <a:ext cx="3097047" cy="4804024"/>
+          </a:xfrm>
+          <a:prstGeom prst="rect">
+            <a:avLst/>
+          </a:prstGeom>
+        </p:spPr>
+      </p:pic>
+      <p:pic>
+        <p:nvPicPr>
+          <p:cNvPr id="7" name="Picture 6">
+            <a:extLst>
+              <a:ext uri="{FF2B5EF4-FFF2-40B4-BE49-F238E27FC236}">
+                <a16:creationId xmlns:a16="http://schemas.microsoft.com/office/drawing/2014/main" id="{FD9BF97B-D540-DCE1-D807-732896173709}"/>
+              </a:ext>
+            </a:extLst>
+          </p:cNvPr>
+          <p:cNvPicPr>
+            <a:picLocks noChangeAspect="1"/>
+          </p:cNvPicPr>
+          <p:nvPr/>
+        </p:nvPicPr>
+        <p:blipFill>
+          <a:blip r:embed="rId3"/>
+          <a:stretch>
+            <a:fillRect/>
+          </a:stretch>
+        </p:blipFill>
+        <p:spPr>
+          <a:xfrm>
+            <a:off x="5410200" y="1575047"/>
+            <a:ext cx="3444538" cy="2080440"/>
+          </a:xfrm>
+          <a:prstGeom prst="rect">
+            <a:avLst/>
+          </a:prstGeom>
+        </p:spPr>
+      </p:pic>
+      <p:pic>
+        <p:nvPicPr>
+          <p:cNvPr id="9" name="Picture 8">
+            <a:extLst>
+              <a:ext uri="{FF2B5EF4-FFF2-40B4-BE49-F238E27FC236}">
+                <a16:creationId xmlns:a16="http://schemas.microsoft.com/office/drawing/2014/main" id="{CF4F3A21-C41C-76B6-DD93-73A50F5EB765}"/>
+              </a:ext>
+            </a:extLst>
+          </p:cNvPr>
+          <p:cNvPicPr>
+            <a:picLocks noChangeAspect="1"/>
+          </p:cNvPicPr>
+          <p:nvPr/>
+        </p:nvPicPr>
+        <p:blipFill>
+          <a:blip r:embed="rId4"/>
+          <a:stretch>
+            <a:fillRect/>
+          </a:stretch>
+        </p:blipFill>
+        <p:spPr>
+          <a:xfrm>
+            <a:off x="5410200" y="3802708"/>
+            <a:ext cx="4343400" cy="2601515"/>
           </a:xfrm>
           <a:prstGeom prst="rect">
             <a:avLst/>
